--- a/ietf-125-fann-slides-v0.pptx
+++ b/ietf-125-fann-slides-v0.pptx
@@ -6,7 +6,7 @@
     <p:sldMasterId id="2147483665" r:id="rId2"/>
   </p:sldMasterIdLst>
   <p:notesMasterIdLst>
-    <p:notesMasterId r:id="rId12"/>
+    <p:notesMasterId r:id="rId13"/>
   </p:notesMasterIdLst>
   <p:sldIdLst>
     <p:sldId id="256" r:id="rId3"/>
@@ -17,52 +17,53 @@
     <p:sldId id="261" r:id="rId8"/>
     <p:sldId id="262" r:id="rId9"/>
     <p:sldId id="263" r:id="rId10"/>
-    <p:sldId id="264" r:id="rId11"/>
+    <p:sldId id="265" r:id="rId11"/>
+    <p:sldId id="264" r:id="rId12"/>
   </p:sldIdLst>
   <p:sldSz cx="9144000" cy="5143500" type="screen16x9"/>
   <p:notesSz cx="6858000" cy="9144000"/>
   <p:embeddedFontLst>
     <p:embeddedFont>
       <p:font typeface="Inter" panose="02000503000000020004" pitchFamily="2" charset="0"/>
-      <p:regular r:id="rId13"/>
-      <p:bold r:id="rId14"/>
-      <p:italic r:id="rId15"/>
-      <p:boldItalic r:id="rId16"/>
+      <p:regular r:id="rId14"/>
+      <p:bold r:id="rId15"/>
+      <p:italic r:id="rId16"/>
+      <p:boldItalic r:id="rId17"/>
     </p:embeddedFont>
     <p:embeddedFont>
       <p:font typeface="Montserrat" pitchFamily="2" charset="77"/>
-      <p:regular r:id="rId17"/>
-      <p:bold r:id="rId18"/>
-      <p:italic r:id="rId19"/>
-      <p:boldItalic r:id="rId20"/>
+      <p:regular r:id="rId18"/>
+      <p:bold r:id="rId19"/>
+      <p:italic r:id="rId20"/>
+      <p:boldItalic r:id="rId21"/>
     </p:embeddedFont>
     <p:embeddedFont>
       <p:font typeface="Open Sans" panose="020B0606030504020204" pitchFamily="34" charset="0"/>
-      <p:regular r:id="rId21"/>
-      <p:bold r:id="rId22"/>
-      <p:italic r:id="rId23"/>
-      <p:boldItalic r:id="rId24"/>
+      <p:regular r:id="rId22"/>
+      <p:bold r:id="rId23"/>
+      <p:italic r:id="rId24"/>
+      <p:boldItalic r:id="rId25"/>
     </p:embeddedFont>
     <p:embeddedFont>
       <p:font typeface="Open Sans Medium" pitchFamily="2" charset="0"/>
-      <p:regular r:id="rId25"/>
-      <p:bold r:id="rId26"/>
-      <p:italic r:id="rId27"/>
-      <p:boldItalic r:id="rId28"/>
+      <p:regular r:id="rId26"/>
+      <p:bold r:id="rId27"/>
+      <p:italic r:id="rId28"/>
+      <p:boldItalic r:id="rId29"/>
     </p:embeddedFont>
     <p:embeddedFont>
       <p:font typeface="Open Sans SemiBold" panose="020B0706030804020204" pitchFamily="34" charset="0"/>
-      <p:regular r:id="rId29"/>
-      <p:bold r:id="rId30"/>
-      <p:italic r:id="rId31"/>
-      <p:boldItalic r:id="rId32"/>
+      <p:regular r:id="rId30"/>
+      <p:bold r:id="rId31"/>
+      <p:italic r:id="rId32"/>
+      <p:boldItalic r:id="rId33"/>
     </p:embeddedFont>
     <p:embeddedFont>
       <p:font typeface="Roboto" panose="02000000000000000000" pitchFamily="2" charset="0"/>
-      <p:regular r:id="rId33"/>
-      <p:bold r:id="rId34"/>
-      <p:italic r:id="rId35"/>
-      <p:boldItalic r:id="rId36"/>
+      <p:regular r:id="rId34"/>
+      <p:bold r:id="rId35"/>
+      <p:italic r:id="rId36"/>
+      <p:boldItalic r:id="rId37"/>
     </p:embeddedFont>
   </p:embeddedFontLst>
   <p:defaultTextStyle>
@@ -14153,6 +14154,54 @@
           </a:lstStyle>
           <a:p>
             <a:endParaRPr/>
+          </a:p>
+        </p:txBody>
+      </p:sp>
+      <p:sp>
+        <p:nvSpPr>
+          <p:cNvPr id="3" name="TextBox 2">
+            <a:extLst>
+              <a:ext uri="{FF2B5EF4-FFF2-40B4-BE49-F238E27FC236}">
+                <a16:creationId xmlns:a16="http://schemas.microsoft.com/office/drawing/2014/main" id="{E1FF4C36-A3EF-DA36-10C9-FFF4C5D21658}"/>
+              </a:ext>
+            </a:extLst>
+          </p:cNvPr>
+          <p:cNvSpPr txBox="1"/>
+          <p:nvPr userDrawn="1">
+            <p:extLst>
+              <p:ext uri="{1162E1C5-73C7-4A58-AE30-91384D911F3F}">
+                <p184:classification xmlns:p184="http://schemas.microsoft.com/office/powerpoint/2018/4/main" val="ftr"/>
+              </p:ext>
+            </p:extLst>
+          </p:nvPr>
+        </p:nvSpPr>
+        <p:spPr>
+          <a:xfrm>
+            <a:off x="8267700" y="4958080"/>
+            <a:ext cx="833438" cy="121920"/>
+          </a:xfrm>
+          <a:prstGeom prst="rect">
+            <a:avLst/>
+          </a:prstGeom>
+        </p:spPr>
+        <p:txBody>
+          <a:bodyPr horzOverflow="overflow" lIns="0" tIns="0" rIns="0" bIns="0">
+            <a:spAutoFit/>
+          </a:bodyPr>
+          <a:lstStyle/>
+          <a:p>
+            <a:pPr algn="l"/>
+            <a:r>
+              <a:rPr lang="en-US" sz="800">
+                <a:solidFill>
+                  <a:srgbClr val="000000">
+                    <a:alpha val="50000"/>
+                  </a:srgbClr>
+                </a:solidFill>
+                <a:latin typeface="Aptos" panose="020B0004020202020204" pitchFamily="34" charset="0"/>
+              </a:rPr>
+              <a:t>Cisco Confidential</a:t>
+            </a:r>
           </a:p>
         </p:txBody>
       </p:sp>
@@ -15701,6 +15750,54 @@
           </a:p>
         </p:txBody>
       </p:sp>
+      <p:sp>
+        <p:nvSpPr>
+          <p:cNvPr id="3" name="TextBox 2">
+            <a:extLst>
+              <a:ext uri="{FF2B5EF4-FFF2-40B4-BE49-F238E27FC236}">
+                <a16:creationId xmlns:a16="http://schemas.microsoft.com/office/drawing/2014/main" id="{91B0B490-09AD-8BBB-7003-6B611F313D8B}"/>
+              </a:ext>
+            </a:extLst>
+          </p:cNvPr>
+          <p:cNvSpPr txBox="1"/>
+          <p:nvPr userDrawn="1">
+            <p:extLst>
+              <p:ext uri="{1162E1C5-73C7-4A58-AE30-91384D911F3F}">
+                <p184:classification xmlns:p184="http://schemas.microsoft.com/office/powerpoint/2018/4/main" val="ftr"/>
+              </p:ext>
+            </p:extLst>
+          </p:nvPr>
+        </p:nvSpPr>
+        <p:spPr>
+          <a:xfrm>
+            <a:off x="8267700" y="4958080"/>
+            <a:ext cx="833438" cy="121920"/>
+          </a:xfrm>
+          <a:prstGeom prst="rect">
+            <a:avLst/>
+          </a:prstGeom>
+        </p:spPr>
+        <p:txBody>
+          <a:bodyPr horzOverflow="overflow" lIns="0" tIns="0" rIns="0" bIns="0">
+            <a:spAutoFit/>
+          </a:bodyPr>
+          <a:lstStyle/>
+          <a:p>
+            <a:pPr algn="l"/>
+            <a:r>
+              <a:rPr lang="en-US" sz="800">
+                <a:solidFill>
+                  <a:srgbClr val="000000">
+                    <a:alpha val="50000"/>
+                  </a:srgbClr>
+                </a:solidFill>
+                <a:latin typeface="Aptos" panose="020B0004020202020204" pitchFamily="34" charset="0"/>
+              </a:rPr>
+              <a:t>Cisco Confidential</a:t>
+            </a:r>
+          </a:p>
+        </p:txBody>
+      </p:sp>
     </p:spTree>
   </p:cSld>
   <p:clrMap bg1="lt1" tx1="dk1" bg2="dk2" tx2="lt2" accent1="accent1" accent2="accent2" accent3="accent3" accent4="accent4" accent5="accent5" accent6="accent6" hlink="hlink" folHlink="folHlink"/>
@@ -16730,6 +16827,133 @@
 </p:sld>
 </file>
 
+<file path=ppt/slides/slide10.xml><?xml version="1.0" encoding="utf-8"?>
+<p:sld xmlns:a="http://schemas.openxmlformats.org/drawingml/2006/main" xmlns:r="http://schemas.openxmlformats.org/officeDocument/2006/relationships" xmlns:p="http://schemas.openxmlformats.org/presentationml/2006/main">
+  <p:cSld>
+    <p:spTree>
+      <p:nvGrpSpPr>
+        <p:cNvPr id="1" name="">
+          <a:extLst>
+            <a:ext uri="{FF2B5EF4-FFF2-40B4-BE49-F238E27FC236}">
+              <a16:creationId xmlns:a16="http://schemas.microsoft.com/office/drawing/2014/main" id="{0CC670B1-77A7-74E1-58C1-E1CCA0B4585D}"/>
+            </a:ext>
+          </a:extLst>
+        </p:cNvPr>
+        <p:cNvGrpSpPr/>
+        <p:nvPr/>
+      </p:nvGrpSpPr>
+      <p:grpSpPr>
+        <a:xfrm>
+          <a:off x="0" y="0"/>
+          <a:ext cx="0" cy="0"/>
+          <a:chOff x="0" y="0"/>
+          <a:chExt cx="0" cy="0"/>
+        </a:xfrm>
+      </p:grpSpPr>
+      <p:sp>
+        <p:nvSpPr>
+          <p:cNvPr id="2" name="Title 1">
+            <a:extLst>
+              <a:ext uri="{FF2B5EF4-FFF2-40B4-BE49-F238E27FC236}">
+                <a16:creationId xmlns:a16="http://schemas.microsoft.com/office/drawing/2014/main" id="{82128357-13A2-3385-7B4A-F61FECE650DE}"/>
+              </a:ext>
+            </a:extLst>
+          </p:cNvPr>
+          <p:cNvSpPr>
+            <a:spLocks noGrp="1"/>
+          </p:cNvSpPr>
+          <p:nvPr>
+            <p:ph type="title"/>
+          </p:nvPr>
+        </p:nvSpPr>
+        <p:spPr/>
+        <p:txBody>
+          <a:bodyPr/>
+          <a:lstStyle/>
+          <a:p>
+            <a:r>
+              <a:rPr lang="en-US" dirty="0"/>
+              <a:t>Next Steps</a:t>
+            </a:r>
+          </a:p>
+        </p:txBody>
+      </p:sp>
+      <p:sp>
+        <p:nvSpPr>
+          <p:cNvPr id="4" name="Slide Number Placeholder 3">
+            <a:extLst>
+              <a:ext uri="{FF2B5EF4-FFF2-40B4-BE49-F238E27FC236}">
+                <a16:creationId xmlns:a16="http://schemas.microsoft.com/office/drawing/2014/main" id="{87396253-4D54-02CB-0E91-E4EEADC85EB0}"/>
+              </a:ext>
+            </a:extLst>
+          </p:cNvPr>
+          <p:cNvSpPr>
+            <a:spLocks noGrp="1"/>
+          </p:cNvSpPr>
+          <p:nvPr>
+            <p:ph type="sldNum" idx="12"/>
+          </p:nvPr>
+        </p:nvSpPr>
+        <p:spPr/>
+        <p:txBody>
+          <a:bodyPr/>
+          <a:lstStyle/>
+          <a:p>
+            <a:pPr marL="0" lvl="0" indent="0" algn="l" rtl="0">
+              <a:spcBef>
+                <a:spcPts val="0"/>
+              </a:spcBef>
+              <a:spcAft>
+                <a:spcPts val="0"/>
+              </a:spcAft>
+              <a:buNone/>
+            </a:pPr>
+            <a:fld id="{00000000-1234-1234-1234-123412341234}" type="slidenum">
+              <a:rPr lang="en-US" smtClean="0"/>
+              <a:t>10</a:t>
+            </a:fld>
+            <a:endParaRPr lang="en-US"/>
+          </a:p>
+        </p:txBody>
+      </p:sp>
+      <p:sp>
+        <p:nvSpPr>
+          <p:cNvPr id="6" name="Text Placeholder 5">
+            <a:extLst>
+              <a:ext uri="{FF2B5EF4-FFF2-40B4-BE49-F238E27FC236}">
+                <a16:creationId xmlns:a16="http://schemas.microsoft.com/office/drawing/2014/main" id="{D788F5EE-70AE-14BF-B311-98370FED5ABC}"/>
+              </a:ext>
+            </a:extLst>
+          </p:cNvPr>
+          <p:cNvSpPr>
+            <a:spLocks noGrp="1"/>
+          </p:cNvSpPr>
+          <p:nvPr>
+            <p:ph type="body" idx="1"/>
+          </p:nvPr>
+        </p:nvSpPr>
+        <p:spPr/>
+        <p:txBody>
+          <a:bodyPr/>
+          <a:lstStyle/>
+          <a:p>
+            <a:endParaRPr lang="en-US"/>
+          </a:p>
+        </p:txBody>
+      </p:sp>
+    </p:spTree>
+    <p:extLst>
+      <p:ext uri="{BB962C8B-B14F-4D97-AF65-F5344CB8AC3E}">
+        <p14:creationId xmlns:p14="http://schemas.microsoft.com/office/powerpoint/2010/main" val="215187763"/>
+      </p:ext>
+    </p:extLst>
+  </p:cSld>
+  <p:clrMapOvr>
+    <a:masterClrMapping/>
+  </p:clrMapOvr>
+</p:sld>
+</file>
+
 <file path=ppt/slides/slide2.xml><?xml version="1.0" encoding="utf-8"?>
 <p:sld xmlns:a="http://schemas.openxmlformats.org/drawingml/2006/main" xmlns:r="http://schemas.openxmlformats.org/officeDocument/2006/relationships" xmlns:p="http://schemas.openxmlformats.org/presentationml/2006/main">
   <p:cSld>
@@ -17468,7 +17692,7 @@
         <p:fade/>
       </p:transition>
     </mc:Choice>
-    <mc:Fallback xmlns:ahyp="http://schemas.microsoft.com/office/drawing/2018/hyperlinkcolor" xmlns:p15="http://schemas.microsoft.com/office/powerpoint/2012/main" xmlns:com="http://schemas.openxmlformats.org/drawingml/2006/compatibility" xmlns:pvml="urn:schemas-microsoft-com:office:powerpoint" xmlns:v="urn:schemas-microsoft-com:vml" xmlns:o="urn:schemas-microsoft-com:office:office" xmlns:dgm="http://schemas.openxmlformats.org/drawingml/2006/diagram" xmlns:c="http://schemas.openxmlformats.org/drawingml/2006/chart" xmlns:mv="urn:schemas-microsoft-com:mac:vml" xmlns="">
+    <mc:Fallback xmlns="" xmlns:mv="urn:schemas-microsoft-com:mac:vml" xmlns:c="http://schemas.openxmlformats.org/drawingml/2006/chart" xmlns:dgm="http://schemas.openxmlformats.org/drawingml/2006/diagram" xmlns:o="urn:schemas-microsoft-com:office:office" xmlns:v="urn:schemas-microsoft-com:vml" xmlns:pvml="urn:schemas-microsoft-com:office:powerpoint" xmlns:com="http://schemas.openxmlformats.org/drawingml/2006/compatibility" xmlns:p15="http://schemas.microsoft.com/office/powerpoint/2012/main" xmlns:ahyp="http://schemas.microsoft.com/office/drawing/2018/hyperlinkcolor">
       <p:transition spd="slow">
         <p:fade/>
       </p:transition>
@@ -18633,7 +18857,7 @@
         <p:cNvPr id="1" name="">
           <a:extLst>
             <a:ext uri="{FF2B5EF4-FFF2-40B4-BE49-F238E27FC236}">
-              <a16:creationId xmlns:a16="http://schemas.microsoft.com/office/drawing/2014/main" id="{0CC670B1-77A7-74E1-58C1-E1CCA0B4585D}"/>
+              <a16:creationId xmlns:a16="http://schemas.microsoft.com/office/drawing/2014/main" id="{2D44A6CC-3F0E-4271-B01F-5FDC554B2AF0}"/>
             </a:ext>
           </a:extLst>
         </p:cNvPr>
@@ -18653,7 +18877,7 @@
           <p:cNvPr id="2" name="Title 1">
             <a:extLst>
               <a:ext uri="{FF2B5EF4-FFF2-40B4-BE49-F238E27FC236}">
-                <a16:creationId xmlns:a16="http://schemas.microsoft.com/office/drawing/2014/main" id="{82128357-13A2-3385-7B4A-F61FECE650DE}"/>
+                <a16:creationId xmlns:a16="http://schemas.microsoft.com/office/drawing/2014/main" id="{587A217E-1F63-F22E-47EF-529A2F51477F}"/>
               </a:ext>
             </a:extLst>
           </p:cNvPr>
@@ -18671,7 +18895,7 @@
           <a:p>
             <a:r>
               <a:rPr lang="en-US" dirty="0"/>
-              <a:t>Next Steps</a:t>
+              <a:t>Acknowledgements</a:t>
             </a:r>
           </a:p>
         </p:txBody>
@@ -18681,7 +18905,7 @@
           <p:cNvPr id="4" name="Slide Number Placeholder 3">
             <a:extLst>
               <a:ext uri="{FF2B5EF4-FFF2-40B4-BE49-F238E27FC236}">
-                <a16:creationId xmlns:a16="http://schemas.microsoft.com/office/drawing/2014/main" id="{87396253-4D54-02CB-0E91-E4EEADC85EB0}"/>
+                <a16:creationId xmlns:a16="http://schemas.microsoft.com/office/drawing/2014/main" id="{D352032F-3F3B-B75A-E937-3D05E41AEE62}"/>
               </a:ext>
             </a:extLst>
           </p:cNvPr>
@@ -18719,7 +18943,7 @@
           <p:cNvPr id="6" name="Text Placeholder 5">
             <a:extLst>
               <a:ext uri="{FF2B5EF4-FFF2-40B4-BE49-F238E27FC236}">
-                <a16:creationId xmlns:a16="http://schemas.microsoft.com/office/drawing/2014/main" id="{D788F5EE-70AE-14BF-B311-98370FED5ABC}"/>
+                <a16:creationId xmlns:a16="http://schemas.microsoft.com/office/drawing/2014/main" id="{66FA077B-8A48-942A-00C5-E6BCC4EB33BB}"/>
               </a:ext>
             </a:extLst>
           </p:cNvPr>
@@ -18730,19 +18954,61 @@
             <p:ph type="body" idx="1"/>
           </p:nvPr>
         </p:nvSpPr>
-        <p:spPr/>
+        <p:spPr>
+          <a:xfrm>
+            <a:off x="538800" y="1802552"/>
+            <a:ext cx="8066400" cy="2710125"/>
+          </a:xfrm>
+        </p:spPr>
         <p:txBody>
           <a:bodyPr/>
           <a:lstStyle/>
           <a:p>
-            <a:endParaRPr lang="en-US"/>
+            <a:r>
+              <a:rPr lang="en-US" dirty="0"/>
+              <a:t>Thanks to Adrian Farrel, </a:t>
+            </a:r>
+            <a:r>
+              <a:rPr lang="en-CA" dirty="0"/>
+              <a:t>Joel Halpern</a:t>
+            </a:r>
+            <a:r>
+              <a:rPr lang="en-US" dirty="0"/>
+              <a:t>, </a:t>
+            </a:r>
+            <a:r>
+              <a:rPr lang="en-CA" dirty="0"/>
+              <a:t>Tal Mizrahi </a:t>
+            </a:r>
+            <a:r>
+              <a:rPr lang="en-US" dirty="0"/>
+              <a:t>, </a:t>
+            </a:r>
+            <a:r>
+              <a:rPr lang="en-CA" dirty="0" err="1"/>
+              <a:t>Yongqing</a:t>
+            </a:r>
+            <a:r>
+              <a:rPr lang="en-CA" dirty="0"/>
+              <a:t> Zhu, CARLOS JESUS BERNARDOS CANO, Jiayuan Hu, et al.,  </a:t>
+            </a:r>
+            <a:r>
+              <a:rPr lang="en-US" dirty="0"/>
+              <a:t>for the review of the Charter text on the mailing list</a:t>
+            </a:r>
+          </a:p>
+          <a:p>
+            <a:r>
+              <a:rPr lang="en-US" dirty="0"/>
+              <a:t>Thanks to Jie Dong for updating the Charter text to address comments received</a:t>
+            </a:r>
           </a:p>
         </p:txBody>
       </p:sp>
     </p:spTree>
     <p:extLst>
       <p:ext uri="{BB962C8B-B14F-4D97-AF65-F5344CB8AC3E}">
-        <p14:creationId xmlns:p14="http://schemas.microsoft.com/office/powerpoint/2010/main" val="215187763"/>
+        <p14:creationId xmlns:p14="http://schemas.microsoft.com/office/powerpoint/2010/main" val="3462364297"/>
       </p:ext>
     </p:extLst>
   </p:cSld>
@@ -19593,4 +19859,10 @@
   <a:objectDefaults/>
   <a:extraClrSchemeLst/>
 </a:theme>
+</file>
+
+<file path=docMetadata/LabelInfo.xml><?xml version="1.0" encoding="utf-8"?>
+<clbl:labelList xmlns:clbl="http://schemas.microsoft.com/office/2020/mipLabelMetadata">
+  <clbl:label id="{c8f49a32-fde3-48a5-9266-b5b0972a22dc}" enabled="1" method="Standard" siteId="{5ae1af62-9505-4097-a69a-c1553ef7840e}" contentBits="2" removed="0"/>
+</clbl:labelList>
 </file>
--- a/ietf-125-fann-slides-v0.pptx
+++ b/ietf-125-fann-slides-v0.pptx
@@ -18990,7 +18990,15 @@
             </a:r>
             <a:r>
               <a:rPr lang="en-CA" dirty="0"/>
-              <a:t> Zhu, CARLOS JESUS BERNARDOS CANO, Jiayuan Hu, et al.,  </a:t>
+              <a:t> Zhu, Carlos Jesus Bernardos </a:t>
+            </a:r>
+            <a:r>
+              <a:rPr lang="en-CA" dirty="0" err="1"/>
+              <a:t>Cano</a:t>
+            </a:r>
+            <a:r>
+              <a:rPr lang="en-CA" dirty="0"/>
+              <a:t>, Jiayuan Hu, et al.,  </a:t>
             </a:r>
             <a:r>
               <a:rPr lang="en-US" dirty="0"/>
@@ -19000,7 +19008,7 @@
           <a:p>
             <a:r>
               <a:rPr lang="en-US" dirty="0"/>
-              <a:t>Thanks to Jie Dong for updating the Charter text to address comments received</a:t>
+              <a:t>Thanks to Jie Dong for updating the Charter text and for addressing the various comments received</a:t>
             </a:r>
           </a:p>
         </p:txBody>

--- a/ietf-125-fann-slides-v0.pptx
+++ b/ietf-125-fann-slides-v0.pptx
@@ -17692,7 +17692,7 @@
         <p:fade/>
       </p:transition>
     </mc:Choice>
-    <mc:Fallback xmlns="" xmlns:mv="urn:schemas-microsoft-com:mac:vml" xmlns:c="http://schemas.openxmlformats.org/drawingml/2006/chart" xmlns:dgm="http://schemas.openxmlformats.org/drawingml/2006/diagram" xmlns:o="urn:schemas-microsoft-com:office:office" xmlns:v="urn:schemas-microsoft-com:vml" xmlns:pvml="urn:schemas-microsoft-com:office:powerpoint" xmlns:com="http://schemas.openxmlformats.org/drawingml/2006/compatibility" xmlns:p15="http://schemas.microsoft.com/office/powerpoint/2012/main" xmlns:ahyp="http://schemas.microsoft.com/office/drawing/2018/hyperlinkcolor">
+    <mc:Fallback xmlns:ahyp="http://schemas.microsoft.com/office/drawing/2018/hyperlinkcolor" xmlns:p15="http://schemas.microsoft.com/office/powerpoint/2012/main" xmlns:com="http://schemas.openxmlformats.org/drawingml/2006/compatibility" xmlns:pvml="urn:schemas-microsoft-com:office:powerpoint" xmlns:v="urn:schemas-microsoft-com:vml" xmlns:o="urn:schemas-microsoft-com:office:office" xmlns:dgm="http://schemas.openxmlformats.org/drawingml/2006/diagram" xmlns:c="http://schemas.openxmlformats.org/drawingml/2006/chart" xmlns:mv="urn:schemas-microsoft-com:mac:vml" xmlns="">
       <p:transition spd="slow">
         <p:fade/>
       </p:transition>
@@ -19008,7 +19008,7 @@
           <a:p>
             <a:r>
               <a:rPr lang="en-US" dirty="0"/>
-              <a:t>Thanks to Jie Dong for updating the Charter text and for addressing the various comments received</a:t>
+              <a:t>Thanks to Jie Dong for addressing many review comments received – updates are work in progress</a:t>
             </a:r>
           </a:p>
         </p:txBody>
